--- a/decks/day1/module-6-hosting-options.pptx
+++ b/decks/day1/module-6-hosting-options.pptx
@@ -4534,7 +4534,7 @@
                 <a:ea typeface="Calibri" pitchFamily="34" charset="-122"/>
                 <a:cs typeface="Calibri" pitchFamily="34" charset="-120"/>
               </a:rPr>
-              <a:t>A Prompt agent is defined entirely as configuration: instructions, model, tools. Author in the Foundry portal or via SDK / REST. Foundry runs it — no application code to maintain, no compute to manage.</a:t>
+              <a:t>A Prompt agent is defined entirely as configuration: instructions, model, tools. Author in the Foundry portal, via SDK / REST, or as a declarative YAML definition. Foundry runs it — no application code to maintain, no compute to manage.</a:t>
             </a:r>
             <a:endParaRPr lang="en-US" sz="1300" dirty="0"/>
           </a:p>

--- a/decks/day1/module-6-hosting-options.pptx
+++ b/decks/day1/module-6-hosting-options.pptx
@@ -514,7 +514,12 @@
           <a:p>
             <a:r>
               <a:rPr lang="en-US" dirty="0"/>
-              <a:t>Terminology-heavy module. Get the words right — these are the actual Foundry Agent Service terms and appear in every future day. All three paths use the Responses API; what changes is where the code runs and how much of the runtime Foundry manages.</a:t>
+              <a:t>• Terminology-heavy module — get the words RIGHT
+• These are the actual Foundry Agent Service terms from Learn docs
+• Wrong vocabulary here cascades into confusion for the rest of the week
+• One-sentence framing: 'three paths, one Responses API'
+• Ordering: A → B → C = most Foundry-managed to least Foundry-managed
+• Time budget: 35 min. Code slides are quick; comparison + gotchas take more time</a:t>
             </a:r>
             <a:endParaRPr lang="en-US" dirty="0"/>
           </a:p>
@@ -602,7 +607,12 @@
           <a:p>
             <a:r>
               <a:rPr lang="en-US" dirty="0"/>
-              <a:t>The first two gotchas are the terminology collisions the module was designed to fix. Reinforce.</a:t>
+              <a:t>• The first two gotchas are the terminology collisions this module was designed to fix
+•   1. 'Prompt agent = client-side' → wrong; Prompt agent is Foundry-managed
+•   2. 'Hosted agent = my code anywhere in Azure' → wrong; specifically means Foundry-run container
+• Reinforce both — attendees will trip on this in the weeks after the workshop
+• Portability gotcha (#3): Path A is Foundry-only; Path B keeps managed features behind the endpoint
+• Auth gotcha (#4): all three use Azure identity, but authenticate to different targets</a:t>
             </a:r>
             <a:endParaRPr lang="en-US" dirty="0"/>
           </a:p>
@@ -690,7 +700,12 @@
           <a:p>
             <a:r>
               <a:rPr lang="en-US" dirty="0"/>
-              <a:t>Anti-lock-in reassurance for the agent code. Foundry-specific *features* remain the coupling — call that out honestly.</a:t>
+              <a:t>• Anti-lock-in reassurance — attendees worry about being trapped
+• The MAF code you write is portable across all three destinations
+• BUT: Foundry-specific FEATURES (Toolbox skills, IQ, agent identity) stay behind the endpoint
+• Be honest about that coupling — don't oversell portability
+• Practical advice: prototype in Path C, promote to A or B later
+• The 'same code, different destination' pitch is the platform's design</a:t>
             </a:r>
             <a:endParaRPr lang="en-US" dirty="0"/>
           </a:p>
@@ -778,7 +793,13 @@
           <a:p>
             <a:r>
               <a:rPr lang="en-US" dirty="0"/>
-              <a:t>Bridge to Module 7 lab kickoff. Attendees should feel prepared.</a:t>
+              <a:t>• Bridge to Module 7 (lab kickoff)
+• Three parts map 1:1 to the three paths just covered
+• Part A: Prompt agent (~30 min)
+• Part B: Hosted agent — connect to pre-deployed (~30 min)
+• Part C: your code + Responses API — the meaty coding part (~45 min)
+• Stretch: zip your Part C code and deploy as your own Hosted agent
+• Attendees should feel prepared, not overwhelmed</a:t>
             </a:r>
             <a:endParaRPr lang="en-US" dirty="0"/>
           </a:p>
@@ -954,7 +975,13 @@
           <a:p>
             <a:r>
               <a:rPr lang="en-US" dirty="0"/>
-              <a:t>Anchor slide. Reinforce: Responses API is the shared entry point. What changes across the three paths is where the code lives and who manages the runtime. Ordering goes from most-Foundry-managed to least.</a:t>
+              <a:t>• Anchor slide — the payoff for the whole module
+• Responses API is the shared entry point across ALL three paths
+• What changes across paths:
+•   Where the code runs
+•   Who manages the runtime
+• Ordering: A most-managed → C least-managed (increasing attendee ownership)
+• Path B and Path C use THE SAME MAF code — call this out early</a:t>
             </a:r>
             <a:endParaRPr lang="en-US" dirty="0"/>
           </a:p>
@@ -1042,7 +1069,12 @@
           <a:p>
             <a:r>
               <a:rPr lang="en-US" dirty="0"/>
-              <a:t>Learn's recommended 'start here' path. Zero infrastructure and the fastest way to see an agent working.</a:t>
+              <a:t>• Path A = Prompt agent = Foundry's 'start here' recommendation
+• Zero code, zero compute — just configuration
+• Two authoring modes: portal-first (interactive) or code-first (SDK/REST/YAML for CI/CD)
+• Best for: fast start, internal tools, agents without custom orchestration
+• Fastest way to see an agent working
+• Attendees do this in Part A of the lab today</a:t>
             </a:r>
             <a:endParaRPr lang="en-US" dirty="0"/>
           </a:p>
@@ -1130,7 +1162,13 @@
           <a:p>
             <a:r>
               <a:rPr lang="en-US" dirty="0"/>
-              <a:t>Path B is where Foundry stops being 'model host' and starts being 'agent app host + platform tooling.' Attendees see this in Part B of the lab.</a:t>
+              <a:t>• Path B = Hosted agent = the 'Foundry as agent app host' story
+• Foundry stops being just a model host — starts being an agent APP host
+• Your code (MAF, LangGraph, OpenAI Agents SDK, or your own)
+• Packaged as container (or zip; Foundry builds the image)
+• Foundry runs it with: managed endpoint, autoscale, dedicated Entra identity, observability
+• Best for: production agents with custom code that need managed hosting + identity
+• Attendees see this in Part B of the lab today</a:t>
             </a:r>
             <a:endParaRPr lang="en-US" dirty="0"/>
           </a:p>
@@ -1218,7 +1256,12 @@
           <a:p>
             <a:r>
               <a:rPr lang="en-US" dirty="0"/>
-              <a:t>Answer to 'why not just run my own container?' — Foundry hosts your app runtime AND the tooling around it in one place.</a:t>
+              <a:t>• The answer to 'why not just run my own container in ACA or AKS?'
+• Foundry hosts your app runtime AND the tooling around it in ONE place
+• What you write: agent logic, instructions, tools, tests, CI
+• What Foundry gives you: everything else on the right column
+• Managed endpoint, autoscale, Entra identity, tracing, content safety, Toolbox, memory
+• This is the 'more than model hosting' pitch you flagged as important</a:t>
             </a:r>
             <a:endParaRPr lang="en-US" dirty="0"/>
           </a:p>
@@ -1306,7 +1349,13 @@
           <a:p>
             <a:r>
               <a:rPr lang="en-US" dirty="0"/>
-              <a:t>The most common developer path. Emphasize the additive relationship with Path B — Path C code becomes a Hosted agent by packaging, not rewriting.</a:t>
+              <a:t>• Path C = your own code + Responses API = the most common developer path
+• Your MAF app in your own process (laptop, ACA, App Service, AKS, Functions)
+• You manage the runtime; Foundry serves the model + tools
+• KEY POINT: Path C code becomes a Path B Hosted agent by packaging
+•   → NOT by rewriting
+•   → same MAF code, different destination
+• Best for: embedding in existing apps, prototyping, full runtime control</a:t>
             </a:r>
             <a:endParaRPr lang="en-US" dirty="0"/>
           </a:p>
@@ -1394,7 +1443,10 @@
           <a:p>
             <a:r>
               <a:rPr lang="en-US" dirty="0"/>
-              <a:t>AIProjectClient.AsAIAgent(...) is C#'s way to write Path C. Python and C# APIs mirror.</a:t>
+              <a:t>• AIProjectClient(...).AsAIAgent(...) = C#'s way to write Path C
+• Python and C# APIs mirror closely
+• Same primitives, same shape, same 'process calls Foundry' pattern
+• For C# devs: this is what Part C of the lab looks like in C#</a:t>
             </a:r>
             <a:endParaRPr lang="en-US" dirty="0"/>
           </a:p>
@@ -1482,7 +1534,12 @@
           <a:p>
             <a:r>
               <a:rPr lang="en-US" dirty="0"/>
-              <a:t>Walk down each row. Emphasize how Path C is the most portable but requires you to handle endpoint, scaling, identity yourself.</a:t>
+              <a:t>• Walk down each row — ~10 seconds per row
+• Path C is the most portable — but you handle endpoint/scale/identity
+• Path A is the least portable — Foundry-only by construction
+• Path B is middle — portable code, non-portable Foundry-managed features
+• The 'cost model' row is important: Path B adds container compute
+• The 'iteration speed' row: A slowest (publish), C fastest (edit + restart)</a:t>
             </a:r>
             <a:endParaRPr lang="en-US" dirty="0"/>
           </a:p>
@@ -1570,7 +1627,11 @@
           <a:p>
             <a:r>
               <a:rPr lang="en-US" dirty="0"/>
-              <a:t>Ask the audience whether their scenario fits more than one row — many will. That's the point.</a:t>
+              <a:t>• Ask: 'anyone see their scenario fitting more than one row?'
+• Many will — that's the point
+• Real systems mix paths
+• Example: shared read-only Prompt agent (A) + custom orchestration agent (B) + embedded assistant (C)
+• There is no wrong answer if you're honest about the constraints</a:t>
             </a:r>
             <a:endParaRPr lang="en-US" dirty="0"/>
           </a:p>

--- a/decks/day1/module-6-hosting-options.pptx
+++ b/decks/day1/module-6-hosting-options.pptx
@@ -5661,7 +5661,7 @@
                 <a:ea typeface="Calibri" pitchFamily="34" charset="-122"/>
                 <a:cs typeface="Calibri" pitchFamily="34" charset="-120"/>
               </a:rPr>
-              <a:t>End-to-end tracing + App Insights integration</a:t>
+              <a:t>End-to-end tracing — every model call, tool invocation, decision; App Insights integration built in</a:t>
             </a:r>
             <a:endParaRPr lang="en-US" sz="1500" dirty="0"/>
           </a:p>

--- a/decks/day1/module-6-hosting-options.pptx
+++ b/decks/day1/module-6-hosting-options.pptx
@@ -1071,7 +1071,7 @@
               <a:rPr lang="en-US" dirty="0"/>
               <a:t>• Path A = Prompt agent = Foundry's 'start here' recommendation
 • Zero code, zero compute — just configuration
-• Two authoring modes: portal-first (interactive) or code-first (SDK/REST/YAML for CI/CD)
+• Two authoring modes: SDK/REST/YAML (Publix norm, CI/CD-friendly) or Foundry portal (exploration)
 • Best for: fast start, internal tools, agents without custom orchestration
 • Fastest way to see an agent working
 • Attendees do this in Part A of the lab today</a:t>
@@ -4595,7 +4595,7 @@
                 <a:ea typeface="Calibri" pitchFamily="34" charset="-122"/>
                 <a:cs typeface="Calibri" pitchFamily="34" charset="-120"/>
               </a:rPr>
-              <a:t>A Prompt agent is defined entirely as configuration: instructions, model, tools. Author in the Foundry portal, via SDK / REST, or as a declarative YAML definition. Foundry runs it — no application code to maintain, no compute to manage.</a:t>
+              <a:t>A Prompt agent is defined entirely as configuration: instructions, model, tools. Author via the SDK / REST (Publix norm, CI/CD-friendly), as a declarative YAML definition, or in the Foundry portal (fine for exploration). Foundry runs it — no application code to maintain, no compute to manage.</a:t>
             </a:r>
             <a:endParaRPr lang="en-US" sz="1300" dirty="0"/>
           </a:p>

--- a/decks/day1/module-6-hosting-options.pptx
+++ b/decks/day1/module-6-hosting-options.pptx
@@ -1071,7 +1071,7 @@
               <a:rPr lang="en-US" dirty="0"/>
               <a:t>• Path A = Prompt agent = Foundry's 'start here' recommendation
 • Zero code, zero compute — just configuration
-• Two authoring modes: SDK/REST/YAML (Publix norm, CI/CD-friendly) or Foundry portal (exploration)
+• Two authoring modes: SDK/REST/YAML (IaC-first norm, CI/CD-friendly) or Foundry portal (exploration)
 • Best for: fast start, internal tools, agents without custom orchestration
 • Fastest way to see an agent working
 • Attendees do this in Part A of the lab today</a:t>
@@ -4595,7 +4595,7 @@
                 <a:ea typeface="Calibri" pitchFamily="34" charset="-122"/>
                 <a:cs typeface="Calibri" pitchFamily="34" charset="-120"/>
               </a:rPr>
-              <a:t>A Prompt agent is defined entirely as configuration: instructions, model, tools. Author via the SDK / REST (Publix norm, CI/CD-friendly), as a declarative YAML definition, or in the Foundry portal (fine for exploration). Foundry runs it — no application code to maintain, no compute to manage.</a:t>
+              <a:t>A Prompt agent is defined entirely as configuration: instructions, model, tools. Author via the SDK / REST (IaC-first norm, CI/CD-friendly), as a declarative YAML definition, or in the Foundry portal (fine for exploration). Foundry runs it — no application code to maintain, no compute to manage.</a:t>
             </a:r>
             <a:endParaRPr lang="en-US" sz="1300" dirty="0"/>
           </a:p>

--- a/decks/day1/module-6-hosting-options.pptx
+++ b/decks/day1/module-6-hosting-options.pptx
@@ -796,7 +796,7 @@
               <a:t>• Bridge to Module 7 (lab kickoff)
 • Three parts map 1:1 to the three paths just covered
 • Part A: Prompt agent (~30 min)
-• Part B: Hosted agent — connect to pre-deployed (~30 min)
+• Part B: Hosted agent — deploy your own with azd (~45 min)
 • Part C: your code + Responses API — the meaty coding part (~45 min)
 • Stretch: zip your Part C code and deploy as your own Hosted agent
 • Attendees should feel prepared, not overwhelmed</a:t>
@@ -3407,7 +3407,7 @@
                 <a:ea typeface="Calibri" pitchFamily="34" charset="-122"/>
                 <a:cs typeface="Calibri" pitchFamily="34" charset="-120"/>
               </a:rPr>
-              <a:t>Part B — Hosted agent: connect to a pre-deployed Hosted agent in the sandbox; walk the portal to see what Foundry manages (endpoint, tracing, identity, Toolbox tool, content safety)</a:t>
+              <a:t>Part B — Hosted agent: deploy your own Hosted agent with azd; connect to it and walk the portal to see what Foundry manages (endpoint, tracing, dedicated identity, content safety)</a:t>
             </a:r>
             <a:endParaRPr lang="en-US" sz="1400" dirty="0"/>
           </a:p>
@@ -3449,7 +3449,7 @@
                 <a:ea typeface="Calibri" pitchFamily="34" charset="-122"/>
                 <a:cs typeface="Calibri" pitchFamily="34" charset="-120"/>
               </a:rPr>
-              <a:t>Stretch (Part C): zip your Part C code and deploy it as your own Hosted agent</a:t>
+              <a:t>Stretch (Part C): extend your Part C code with a custom function tool or a Foundry IQ knowledge source (both deep-dive on Days 2–3)</a:t>
             </a:r>
             <a:endParaRPr lang="en-US" sz="1400" dirty="0"/>
           </a:p>

--- a/decks/day1/module-6-hosting-options.pptx
+++ b/decks/day1/module-6-hosting-options.pptx
@@ -4716,7 +4716,7 @@
                 <a:ea typeface="Consolas" pitchFamily="34" charset="-122"/>
                 <a:cs typeface="Consolas" pitchFamily="34" charset="-120"/>
               </a:rPr>
-              <a:t>    project_endpoint="https://&lt;project&gt;.services.ai.azure.com",</a:t>
+              <a:t>    project_endpoint="https://&lt;foundry-resource&gt;.services.ai.azure.com/api/projects/&lt;your-project&gt;",</a:t>
             </a:r>
             <a:endParaRPr lang="en-US" sz="1300" dirty="0"/>
           </a:p>
@@ -5130,7 +5130,7 @@
                 <a:ea typeface="Consolas" pitchFamily="34" charset="-122"/>
                 <a:cs typeface="Consolas" pitchFamily="34" charset="-120"/>
               </a:rPr>
-              <a:t>    project_endpoint="https://&lt;project&gt;.services.ai.azure.com",</a:t>
+              <a:t>    project_endpoint="https://&lt;foundry-resource&gt;.services.ai.azure.com/api/projects/&lt;your-project&gt;",</a:t>
             </a:r>
             <a:endParaRPr lang="en-US" sz="1200" dirty="0"/>
           </a:p>

--- a/decks/day1/module-6-hosting-options.pptx
+++ b/decks/day1/module-6-hosting-options.pptx
@@ -10344,11 +10344,11 @@
             <a:avLst/>
           </a:prstGeom>
           <a:solidFill>
-            <a:srgbClr val="F3F4F6"/>
+            <a:srgbClr val="1D1E22"/>
           </a:solidFill>
-          <a:ln w="6350">
+          <a:ln w="9525">
             <a:solidFill>
-              <a:srgbClr val="D1D5DB"/>
+              <a:srgbClr val="2A2B2E"/>
             </a:solidFill>
             <a:prstDash val="solid"/>
           </a:ln>
@@ -10372,7 +10372,9 @@
           <a:ln/>
         </p:spPr>
         <p:txBody>
-          <a:bodyPr wrap="square" lIns="0" tIns="0" rIns="0" bIns="0" rtlCol="0" anchor="t"/>
+          <a:bodyPr wrap="square" lIns="0" tIns="0" rIns="0" bIns="0" rtlCol="0" anchor="t">
+            <a:normAutofit/>
+          </a:bodyPr>
           <a:lstStyle/>
           <a:p>
             <a:pPr indent="0" marL="0">
@@ -10381,70 +10383,55 @@
             <a:r>
               <a:rPr lang="en-US" sz="1300" dirty="0">
                 <a:solidFill>
-                  <a:srgbClr val="212121"/>
+                  <a:srgbClr val="A996B6"/>
                 </a:solidFill>
                 <a:latin typeface="Consolas" pitchFamily="34" charset="0"/>
                 <a:ea typeface="Consolas" pitchFamily="34" charset="-122"/>
                 <a:cs typeface="Consolas" pitchFamily="34" charset="-120"/>
               </a:rPr>
-              <a:t>from agent_framework.foundry import FoundryAgent</a:t>
-            </a:r>
-            <a:endParaRPr lang="en-US" sz="1300" dirty="0"/>
-          </a:p>
-          <a:p>
+              <a:t>from</a:t>
+            </a:r>
             <a:pPr indent="0" marL="0">
               <a:buNone/>
             </a:pPr>
             <a:r>
               <a:rPr lang="en-US" sz="1300" dirty="0">
                 <a:solidFill>
-                  <a:srgbClr val="212121"/>
+                  <a:srgbClr val="FFFFFF"/>
                 </a:solidFill>
                 <a:latin typeface="Consolas" pitchFamily="34" charset="0"/>
                 <a:ea typeface="Consolas" pitchFamily="34" charset="-122"/>
                 <a:cs typeface="Consolas" pitchFamily="34" charset="-120"/>
               </a:rPr>
-              <a:t>from azure.identity import AzureCliCredential</a:t>
-            </a:r>
-            <a:endParaRPr lang="en-US" sz="1300" dirty="0"/>
-          </a:p>
-          <a:p>
+              <a:t> agent_framework.foundry </a:t>
+            </a:r>
             <a:pPr indent="0" marL="0">
               <a:buNone/>
             </a:pPr>
-            <a:endParaRPr lang="en-US" sz="1300" dirty="0"/>
-          </a:p>
-          <a:p>
-            <a:pPr indent="0" marL="0">
-              <a:buNone/>
-            </a:pPr>
             <a:r>
               <a:rPr lang="en-US" sz="1300" dirty="0">
                 <a:solidFill>
-                  <a:srgbClr val="212121"/>
+                  <a:srgbClr val="A996B6"/>
                 </a:solidFill>
                 <a:latin typeface="Consolas" pitchFamily="34" charset="0"/>
                 <a:ea typeface="Consolas" pitchFamily="34" charset="-122"/>
                 <a:cs typeface="Consolas" pitchFamily="34" charset="-120"/>
               </a:rPr>
-              <a:t>agent = FoundryAgent(</a:t>
-            </a:r>
-            <a:endParaRPr lang="en-US" sz="1300" dirty="0"/>
-          </a:p>
-          <a:p>
+              <a:t>import</a:t>
+            </a:r>
             <a:pPr indent="0" marL="0">
               <a:buNone/>
             </a:pPr>
             <a:r>
               <a:rPr lang="en-US" sz="1300" dirty="0">
                 <a:solidFill>
-                  <a:srgbClr val="212121"/>
+                  <a:srgbClr val="FFFFFF"/>
                 </a:solidFill>
                 <a:latin typeface="Consolas" pitchFamily="34" charset="0"/>
                 <a:ea typeface="Consolas" pitchFamily="34" charset="-122"/>
                 <a:cs typeface="Consolas" pitchFamily="34" charset="-120"/>
               </a:rPr>
-              <a:t>    project_endpoint="https://&lt;foundry-resource&gt;.services.ai.azure.com/api/projects/&lt;your-project&gt;",</a:t>
+              <a:t> FoundryAgent</a:t>
             </a:r>
             <a:endParaRPr lang="en-US" sz="1300" dirty="0"/>
           </a:p>
@@ -10455,64 +10442,55 @@
             <a:r>
               <a:rPr lang="en-US" sz="1300" dirty="0">
                 <a:solidFill>
-                  <a:srgbClr val="212121"/>
+                  <a:srgbClr val="A996B6"/>
                 </a:solidFill>
                 <a:latin typeface="Consolas" pitchFamily="34" charset="0"/>
                 <a:ea typeface="Consolas" pitchFamily="34" charset="-122"/>
                 <a:cs typeface="Consolas" pitchFamily="34" charset="-120"/>
               </a:rPr>
-              <a:t>    agent_name="docs-assistant",</a:t>
-            </a:r>
-            <a:endParaRPr lang="en-US" sz="1300" dirty="0"/>
-          </a:p>
-          <a:p>
+              <a:t>from</a:t>
+            </a:r>
             <a:pPr indent="0" marL="0">
               <a:buNone/>
             </a:pPr>
             <a:r>
               <a:rPr lang="en-US" sz="1300" dirty="0">
                 <a:solidFill>
-                  <a:srgbClr val="212121"/>
+                  <a:srgbClr val="FFFFFF"/>
                 </a:solidFill>
                 <a:latin typeface="Consolas" pitchFamily="34" charset="0"/>
                 <a:ea typeface="Consolas" pitchFamily="34" charset="-122"/>
                 <a:cs typeface="Consolas" pitchFamily="34" charset="-120"/>
               </a:rPr>
-              <a:t>    agent_version="1.0",</a:t>
-            </a:r>
-            <a:endParaRPr lang="en-US" sz="1300" dirty="0"/>
-          </a:p>
-          <a:p>
+              <a:t> azure.identity </a:t>
+            </a:r>
             <a:pPr indent="0" marL="0">
               <a:buNone/>
             </a:pPr>
             <a:r>
               <a:rPr lang="en-US" sz="1300" dirty="0">
                 <a:solidFill>
-                  <a:srgbClr val="212121"/>
+                  <a:srgbClr val="A996B6"/>
                 </a:solidFill>
                 <a:latin typeface="Consolas" pitchFamily="34" charset="0"/>
                 <a:ea typeface="Consolas" pitchFamily="34" charset="-122"/>
                 <a:cs typeface="Consolas" pitchFamily="34" charset="-120"/>
               </a:rPr>
-              <a:t>    credential=AzureCliCredential(),</a:t>
-            </a:r>
-            <a:endParaRPr lang="en-US" sz="1300" dirty="0"/>
-          </a:p>
-          <a:p>
+              <a:t>import</a:t>
+            </a:r>
             <a:pPr indent="0" marL="0">
               <a:buNone/>
             </a:pPr>
             <a:r>
               <a:rPr lang="en-US" sz="1300" dirty="0">
                 <a:solidFill>
-                  <a:srgbClr val="212121"/>
+                  <a:srgbClr val="FFFFFF"/>
                 </a:solidFill>
                 <a:latin typeface="Consolas" pitchFamily="34" charset="0"/>
                 <a:ea typeface="Consolas" pitchFamily="34" charset="-122"/>
                 <a:cs typeface="Consolas" pitchFamily="34" charset="-120"/>
               </a:rPr>
-              <a:t>)</a:t>
+              <a:t> AzureCliCredential</a:t>
             </a:r>
             <a:endParaRPr lang="en-US" sz="1300" dirty="0"/>
           </a:p>
@@ -10520,16 +10498,264 @@
             <a:pPr indent="0" marL="0">
               <a:buNone/>
             </a:pPr>
+            <a:endParaRPr lang="en-US" sz="1300" dirty="0"/>
+          </a:p>
+          <a:p>
+            <a:pPr indent="0" marL="0">
+              <a:buNone/>
+            </a:pPr>
             <a:r>
               <a:rPr lang="en-US" sz="1300" dirty="0">
                 <a:solidFill>
-                  <a:srgbClr val="212121"/>
+                  <a:srgbClr val="FFFFFF"/>
                 </a:solidFill>
                 <a:latin typeface="Consolas" pitchFamily="34" charset="0"/>
                 <a:ea typeface="Consolas" pitchFamily="34" charset="-122"/>
                 <a:cs typeface="Consolas" pitchFamily="34" charset="-120"/>
               </a:rPr>
-              <a:t>result = await agent.run("What is Foundry IQ?")</a:t>
+              <a:t>agent = FoundryAgent(</a:t>
+            </a:r>
+            <a:endParaRPr lang="en-US" sz="1300" dirty="0"/>
+          </a:p>
+          <a:p>
+            <a:pPr indent="0" marL="0">
+              <a:buNone/>
+            </a:pPr>
+            <a:r>
+              <a:rPr lang="en-US" sz="1300" dirty="0">
+                <a:solidFill>
+                  <a:srgbClr val="FFFFFF"/>
+                </a:solidFill>
+                <a:latin typeface="Consolas" pitchFamily="34" charset="0"/>
+                <a:ea typeface="Consolas" pitchFamily="34" charset="-122"/>
+                <a:cs typeface="Consolas" pitchFamily="34" charset="-120"/>
+              </a:rPr>
+              <a:t>    project_endpoint=</a:t>
+            </a:r>
+            <a:pPr indent="0" marL="0">
+              <a:buNone/>
+            </a:pPr>
+            <a:r>
+              <a:rPr lang="en-US" sz="1300" dirty="0">
+                <a:solidFill>
+                  <a:srgbClr val="E4C98A"/>
+                </a:solidFill>
+                <a:latin typeface="Consolas" pitchFamily="34" charset="0"/>
+                <a:ea typeface="Consolas" pitchFamily="34" charset="-122"/>
+                <a:cs typeface="Consolas" pitchFamily="34" charset="-120"/>
+              </a:rPr>
+              <a:t>"https://&lt;foundry-resource&gt;.services.ai.azure.com/api/projects/&lt;your-project&gt;"</a:t>
+            </a:r>
+            <a:pPr indent="0" marL="0">
+              <a:buNone/>
+            </a:pPr>
+            <a:r>
+              <a:rPr lang="en-US" sz="1300" dirty="0">
+                <a:solidFill>
+                  <a:srgbClr val="FFFFFF"/>
+                </a:solidFill>
+                <a:latin typeface="Consolas" pitchFamily="34" charset="0"/>
+                <a:ea typeface="Consolas" pitchFamily="34" charset="-122"/>
+                <a:cs typeface="Consolas" pitchFamily="34" charset="-120"/>
+              </a:rPr>
+              <a:t>,</a:t>
+            </a:r>
+            <a:endParaRPr lang="en-US" sz="1300" dirty="0"/>
+          </a:p>
+          <a:p>
+            <a:pPr indent="0" marL="0">
+              <a:buNone/>
+            </a:pPr>
+            <a:r>
+              <a:rPr lang="en-US" sz="1300" dirty="0">
+                <a:solidFill>
+                  <a:srgbClr val="FFFFFF"/>
+                </a:solidFill>
+                <a:latin typeface="Consolas" pitchFamily="34" charset="0"/>
+                <a:ea typeface="Consolas" pitchFamily="34" charset="-122"/>
+                <a:cs typeface="Consolas" pitchFamily="34" charset="-120"/>
+              </a:rPr>
+              <a:t>    agent_name=</a:t>
+            </a:r>
+            <a:pPr indent="0" marL="0">
+              <a:buNone/>
+            </a:pPr>
+            <a:r>
+              <a:rPr lang="en-US" sz="1300" dirty="0">
+                <a:solidFill>
+                  <a:srgbClr val="E4C98A"/>
+                </a:solidFill>
+                <a:latin typeface="Consolas" pitchFamily="34" charset="0"/>
+                <a:ea typeface="Consolas" pitchFamily="34" charset="-122"/>
+                <a:cs typeface="Consolas" pitchFamily="34" charset="-120"/>
+              </a:rPr>
+              <a:t>"docs-assistant"</a:t>
+            </a:r>
+            <a:pPr indent="0" marL="0">
+              <a:buNone/>
+            </a:pPr>
+            <a:r>
+              <a:rPr lang="en-US" sz="1300" dirty="0">
+                <a:solidFill>
+                  <a:srgbClr val="FFFFFF"/>
+                </a:solidFill>
+                <a:latin typeface="Consolas" pitchFamily="34" charset="0"/>
+                <a:ea typeface="Consolas" pitchFamily="34" charset="-122"/>
+                <a:cs typeface="Consolas" pitchFamily="34" charset="-120"/>
+              </a:rPr>
+              <a:t>,</a:t>
+            </a:r>
+            <a:endParaRPr lang="en-US" sz="1300" dirty="0"/>
+          </a:p>
+          <a:p>
+            <a:pPr indent="0" marL="0">
+              <a:buNone/>
+            </a:pPr>
+            <a:r>
+              <a:rPr lang="en-US" sz="1300" dirty="0">
+                <a:solidFill>
+                  <a:srgbClr val="FFFFFF"/>
+                </a:solidFill>
+                <a:latin typeface="Consolas" pitchFamily="34" charset="0"/>
+                <a:ea typeface="Consolas" pitchFamily="34" charset="-122"/>
+                <a:cs typeface="Consolas" pitchFamily="34" charset="-120"/>
+              </a:rPr>
+              <a:t>    agent_version=</a:t>
+            </a:r>
+            <a:pPr indent="0" marL="0">
+              <a:buNone/>
+            </a:pPr>
+            <a:r>
+              <a:rPr lang="en-US" sz="1300" dirty="0">
+                <a:solidFill>
+                  <a:srgbClr val="E4C98A"/>
+                </a:solidFill>
+                <a:latin typeface="Consolas" pitchFamily="34" charset="0"/>
+                <a:ea typeface="Consolas" pitchFamily="34" charset="-122"/>
+                <a:cs typeface="Consolas" pitchFamily="34" charset="-120"/>
+              </a:rPr>
+              <a:t>"1.0"</a:t>
+            </a:r>
+            <a:pPr indent="0" marL="0">
+              <a:buNone/>
+            </a:pPr>
+            <a:r>
+              <a:rPr lang="en-US" sz="1300" dirty="0">
+                <a:solidFill>
+                  <a:srgbClr val="FFFFFF"/>
+                </a:solidFill>
+                <a:latin typeface="Consolas" pitchFamily="34" charset="0"/>
+                <a:ea typeface="Consolas" pitchFamily="34" charset="-122"/>
+                <a:cs typeface="Consolas" pitchFamily="34" charset="-120"/>
+              </a:rPr>
+              <a:t>,</a:t>
+            </a:r>
+            <a:endParaRPr lang="en-US" sz="1300" dirty="0"/>
+          </a:p>
+          <a:p>
+            <a:pPr indent="0" marL="0">
+              <a:buNone/>
+            </a:pPr>
+            <a:r>
+              <a:rPr lang="en-US" sz="1300" dirty="0">
+                <a:solidFill>
+                  <a:srgbClr val="FFFFFF"/>
+                </a:solidFill>
+                <a:latin typeface="Consolas" pitchFamily="34" charset="0"/>
+                <a:ea typeface="Consolas" pitchFamily="34" charset="-122"/>
+                <a:cs typeface="Consolas" pitchFamily="34" charset="-120"/>
+              </a:rPr>
+              <a:t>    credential=AzureCliCredential(),</a:t>
+            </a:r>
+            <a:endParaRPr lang="en-US" sz="1300" dirty="0"/>
+          </a:p>
+          <a:p>
+            <a:pPr indent="0" marL="0">
+              <a:buNone/>
+            </a:pPr>
+            <a:r>
+              <a:rPr lang="en-US" sz="1300" dirty="0">
+                <a:solidFill>
+                  <a:srgbClr val="FFFFFF"/>
+                </a:solidFill>
+                <a:latin typeface="Consolas" pitchFamily="34" charset="0"/>
+                <a:ea typeface="Consolas" pitchFamily="34" charset="-122"/>
+                <a:cs typeface="Consolas" pitchFamily="34" charset="-120"/>
+              </a:rPr>
+              <a:t>)</a:t>
+            </a:r>
+            <a:endParaRPr lang="en-US" sz="1300" dirty="0"/>
+          </a:p>
+          <a:p>
+            <a:pPr indent="0" marL="0">
+              <a:buNone/>
+            </a:pPr>
+            <a:r>
+              <a:rPr lang="en-US" sz="1300" dirty="0">
+                <a:solidFill>
+                  <a:srgbClr val="FFFFFF"/>
+                </a:solidFill>
+                <a:latin typeface="Consolas" pitchFamily="34" charset="0"/>
+                <a:ea typeface="Consolas" pitchFamily="34" charset="-122"/>
+                <a:cs typeface="Consolas" pitchFamily="34" charset="-120"/>
+              </a:rPr>
+              <a:t>result = </a:t>
+            </a:r>
+            <a:pPr indent="0" marL="0">
+              <a:buNone/>
+            </a:pPr>
+            <a:r>
+              <a:rPr lang="en-US" sz="1300" dirty="0">
+                <a:solidFill>
+                  <a:srgbClr val="A996B6"/>
+                </a:solidFill>
+                <a:latin typeface="Consolas" pitchFamily="34" charset="0"/>
+                <a:ea typeface="Consolas" pitchFamily="34" charset="-122"/>
+                <a:cs typeface="Consolas" pitchFamily="34" charset="-120"/>
+              </a:rPr>
+              <a:t>await</a:t>
+            </a:r>
+            <a:pPr indent="0" marL="0">
+              <a:buNone/>
+            </a:pPr>
+            <a:r>
+              <a:rPr lang="en-US" sz="1300" dirty="0">
+                <a:solidFill>
+                  <a:srgbClr val="FFFFFF"/>
+                </a:solidFill>
+                <a:latin typeface="Consolas" pitchFamily="34" charset="0"/>
+                <a:ea typeface="Consolas" pitchFamily="34" charset="-122"/>
+                <a:cs typeface="Consolas" pitchFamily="34" charset="-120"/>
+              </a:rPr>
+              <a:t> agent.run(</a:t>
+            </a:r>
+            <a:pPr indent="0" marL="0">
+              <a:buNone/>
+            </a:pPr>
+            <a:r>
+              <a:rPr lang="en-US" sz="1300" dirty="0">
+                <a:solidFill>
+                  <a:srgbClr val="E4C98A"/>
+                </a:solidFill>
+                <a:latin typeface="Consolas" pitchFamily="34" charset="0"/>
+                <a:ea typeface="Consolas" pitchFamily="34" charset="-122"/>
+                <a:cs typeface="Consolas" pitchFamily="34" charset="-120"/>
+              </a:rPr>
+              <a:t>"What is Foundry IQ?"</a:t>
+            </a:r>
+            <a:pPr indent="0" marL="0">
+              <a:buNone/>
+            </a:pPr>
+            <a:r>
+              <a:rPr lang="en-US" sz="1300" dirty="0">
+                <a:solidFill>
+                  <a:srgbClr val="FFFFFF"/>
+                </a:solidFill>
+                <a:latin typeface="Consolas" pitchFamily="34" charset="0"/>
+                <a:ea typeface="Consolas" pitchFamily="34" charset="-122"/>
+                <a:cs typeface="Consolas" pitchFamily="34" charset="-120"/>
+              </a:rPr>
+              <a:t>)</a:t>
             </a:r>
             <a:endParaRPr lang="en-US" sz="1300" dirty="0"/>
           </a:p>
@@ -10758,11 +10984,11 @@
             <a:avLst/>
           </a:prstGeom>
           <a:solidFill>
-            <a:srgbClr val="F3F4F6"/>
+            <a:srgbClr val="1D1E22"/>
           </a:solidFill>
-          <a:ln w="6350">
+          <a:ln w="9525">
             <a:solidFill>
-              <a:srgbClr val="D1D5DB"/>
+              <a:srgbClr val="2A2B2E"/>
             </a:solidFill>
             <a:prstDash val="solid"/>
           </a:ln>
@@ -10786,16 +11012,18 @@
           <a:ln/>
         </p:spPr>
         <p:txBody>
-          <a:bodyPr wrap="square" lIns="0" tIns="0" rIns="0" bIns="0" rtlCol="0" anchor="t"/>
+          <a:bodyPr wrap="square" lIns="0" tIns="0" rIns="0" bIns="0" rtlCol="0" anchor="t">
+            <a:normAutofit/>
+          </a:bodyPr>
           <a:lstStyle/>
           <a:p>
             <a:pPr indent="0" marL="0">
               <a:buNone/>
             </a:pPr>
             <a:r>
-              <a:rPr lang="en-US" sz="1200" dirty="0">
-                <a:solidFill>
-                  <a:srgbClr val="212121"/>
+              <a:rPr lang="en-US" sz="1200" i="1" dirty="0">
+                <a:solidFill>
+                  <a:srgbClr val="666666"/>
                 </a:solidFill>
                 <a:latin typeface="Consolas" pitchFamily="34" charset="0"/>
                 <a:ea typeface="Consolas" pitchFamily="34" charset="-122"/>
@@ -10812,70 +11040,55 @@
             <a:r>
               <a:rPr lang="en-US" sz="1200" dirty="0">
                 <a:solidFill>
-                  <a:srgbClr val="212121"/>
+                  <a:srgbClr val="A996B6"/>
                 </a:solidFill>
                 <a:latin typeface="Consolas" pitchFamily="34" charset="0"/>
                 <a:ea typeface="Consolas" pitchFamily="34" charset="-122"/>
                 <a:cs typeface="Consolas" pitchFamily="34" charset="-120"/>
               </a:rPr>
-              <a:t>from agent_framework.foundry import FoundryAgent</a:t>
-            </a:r>
-            <a:endParaRPr lang="en-US" sz="1200" dirty="0"/>
-          </a:p>
-          <a:p>
+              <a:t>from</a:t>
+            </a:r>
             <a:pPr indent="0" marL="0">
               <a:buNone/>
             </a:pPr>
-            <a:endParaRPr lang="en-US" sz="1200" dirty="0"/>
-          </a:p>
-          <a:p>
-            <a:pPr indent="0" marL="0">
-              <a:buNone/>
-            </a:pPr>
             <a:r>
               <a:rPr lang="en-US" sz="1200" dirty="0">
                 <a:solidFill>
-                  <a:srgbClr val="212121"/>
+                  <a:srgbClr val="FFFFFF"/>
                 </a:solidFill>
                 <a:latin typeface="Consolas" pitchFamily="34" charset="0"/>
                 <a:ea typeface="Consolas" pitchFamily="34" charset="-122"/>
                 <a:cs typeface="Consolas" pitchFamily="34" charset="-120"/>
               </a:rPr>
-              <a:t>agent = FoundryAgent(</a:t>
-            </a:r>
-            <a:endParaRPr lang="en-US" sz="1200" dirty="0"/>
-          </a:p>
-          <a:p>
+              <a:t> agent_framework.foundry </a:t>
+            </a:r>
             <a:pPr indent="0" marL="0">
               <a:buNone/>
             </a:pPr>
             <a:r>
               <a:rPr lang="en-US" sz="1200" dirty="0">
                 <a:solidFill>
-                  <a:srgbClr val="212121"/>
+                  <a:srgbClr val="A996B6"/>
                 </a:solidFill>
                 <a:latin typeface="Consolas" pitchFamily="34" charset="0"/>
                 <a:ea typeface="Consolas" pitchFamily="34" charset="-122"/>
                 <a:cs typeface="Consolas" pitchFamily="34" charset="-120"/>
               </a:rPr>
-              <a:t>    project_endpoint="https://&lt;foundry-resource&gt;.services.ai.azure.com/api/projects/&lt;your-project&gt;",</a:t>
-            </a:r>
-            <a:endParaRPr lang="en-US" sz="1200" dirty="0"/>
-          </a:p>
-          <a:p>
+              <a:t>import</a:t>
+            </a:r>
             <a:pPr indent="0" marL="0">
               <a:buNone/>
             </a:pPr>
             <a:r>
               <a:rPr lang="en-US" sz="1200" dirty="0">
                 <a:solidFill>
-                  <a:srgbClr val="212121"/>
+                  <a:srgbClr val="FFFFFF"/>
                 </a:solidFill>
                 <a:latin typeface="Consolas" pitchFamily="34" charset="0"/>
                 <a:ea typeface="Consolas" pitchFamily="34" charset="-122"/>
                 <a:cs typeface="Consolas" pitchFamily="34" charset="-120"/>
               </a:rPr>
-              <a:t>    agent_name="docs-assistant-hosted",</a:t>
+              <a:t> FoundryAgent</a:t>
             </a:r>
             <a:endParaRPr lang="en-US" sz="1200" dirty="0"/>
           </a:p>
@@ -10883,15 +11096,128 @@
             <a:pPr indent="0" marL="0">
               <a:buNone/>
             </a:pPr>
+            <a:endParaRPr lang="en-US" sz="1200" dirty="0"/>
+          </a:p>
+          <a:p>
+            <a:pPr indent="0" marL="0">
+              <a:buNone/>
+            </a:pPr>
             <a:r>
               <a:rPr lang="en-US" sz="1200" dirty="0">
                 <a:solidFill>
-                  <a:srgbClr val="212121"/>
+                  <a:srgbClr val="FFFFFF"/>
                 </a:solidFill>
                 <a:latin typeface="Consolas" pitchFamily="34" charset="0"/>
                 <a:ea typeface="Consolas" pitchFamily="34" charset="-122"/>
                 <a:cs typeface="Consolas" pitchFamily="34" charset="-120"/>
               </a:rPr>
+              <a:t>agent = FoundryAgent(</a:t>
+            </a:r>
+            <a:endParaRPr lang="en-US" sz="1200" dirty="0"/>
+          </a:p>
+          <a:p>
+            <a:pPr indent="0" marL="0">
+              <a:buNone/>
+            </a:pPr>
+            <a:r>
+              <a:rPr lang="en-US" sz="1200" dirty="0">
+                <a:solidFill>
+                  <a:srgbClr val="FFFFFF"/>
+                </a:solidFill>
+                <a:latin typeface="Consolas" pitchFamily="34" charset="0"/>
+                <a:ea typeface="Consolas" pitchFamily="34" charset="-122"/>
+                <a:cs typeface="Consolas" pitchFamily="34" charset="-120"/>
+              </a:rPr>
+              <a:t>    project_endpoint=</a:t>
+            </a:r>
+            <a:pPr indent="0" marL="0">
+              <a:buNone/>
+            </a:pPr>
+            <a:r>
+              <a:rPr lang="en-US" sz="1200" dirty="0">
+                <a:solidFill>
+                  <a:srgbClr val="E4C98A"/>
+                </a:solidFill>
+                <a:latin typeface="Consolas" pitchFamily="34" charset="0"/>
+                <a:ea typeface="Consolas" pitchFamily="34" charset="-122"/>
+                <a:cs typeface="Consolas" pitchFamily="34" charset="-120"/>
+              </a:rPr>
+              <a:t>"https://&lt;foundry-resource&gt;.services.ai.azure.com/api/projects/&lt;your-project&gt;"</a:t>
+            </a:r>
+            <a:pPr indent="0" marL="0">
+              <a:buNone/>
+            </a:pPr>
+            <a:r>
+              <a:rPr lang="en-US" sz="1200" dirty="0">
+                <a:solidFill>
+                  <a:srgbClr val="FFFFFF"/>
+                </a:solidFill>
+                <a:latin typeface="Consolas" pitchFamily="34" charset="0"/>
+                <a:ea typeface="Consolas" pitchFamily="34" charset="-122"/>
+                <a:cs typeface="Consolas" pitchFamily="34" charset="-120"/>
+              </a:rPr>
+              <a:t>,</a:t>
+            </a:r>
+            <a:endParaRPr lang="en-US" sz="1200" dirty="0"/>
+          </a:p>
+          <a:p>
+            <a:pPr indent="0" marL="0">
+              <a:buNone/>
+            </a:pPr>
+            <a:r>
+              <a:rPr lang="en-US" sz="1200" dirty="0">
+                <a:solidFill>
+                  <a:srgbClr val="FFFFFF"/>
+                </a:solidFill>
+                <a:latin typeface="Consolas" pitchFamily="34" charset="0"/>
+                <a:ea typeface="Consolas" pitchFamily="34" charset="-122"/>
+                <a:cs typeface="Consolas" pitchFamily="34" charset="-120"/>
+              </a:rPr>
+              <a:t>    agent_name=</a:t>
+            </a:r>
+            <a:pPr indent="0" marL="0">
+              <a:buNone/>
+            </a:pPr>
+            <a:r>
+              <a:rPr lang="en-US" sz="1200" dirty="0">
+                <a:solidFill>
+                  <a:srgbClr val="E4C98A"/>
+                </a:solidFill>
+                <a:latin typeface="Consolas" pitchFamily="34" charset="0"/>
+                <a:ea typeface="Consolas" pitchFamily="34" charset="-122"/>
+                <a:cs typeface="Consolas" pitchFamily="34" charset="-120"/>
+              </a:rPr>
+              <a:t>"docs-assistant-hosted"</a:t>
+            </a:r>
+            <a:pPr indent="0" marL="0">
+              <a:buNone/>
+            </a:pPr>
+            <a:r>
+              <a:rPr lang="en-US" sz="1200" dirty="0">
+                <a:solidFill>
+                  <a:srgbClr val="FFFFFF"/>
+                </a:solidFill>
+                <a:latin typeface="Consolas" pitchFamily="34" charset="0"/>
+                <a:ea typeface="Consolas" pitchFamily="34" charset="-122"/>
+                <a:cs typeface="Consolas" pitchFamily="34" charset="-120"/>
+              </a:rPr>
+              <a:t>,</a:t>
+            </a:r>
+            <a:endParaRPr lang="en-US" sz="1200" dirty="0"/>
+          </a:p>
+          <a:p>
+            <a:pPr indent="0" marL="0">
+              <a:buNone/>
+            </a:pPr>
+            <a:r>
+              <a:rPr lang="en-US" sz="1200" dirty="0">
+                <a:solidFill>
+                  <a:srgbClr val="FFFFFF"/>
+                </a:solidFill>
+                <a:latin typeface="Consolas" pitchFamily="34" charset="0"/>
+                <a:ea typeface="Consolas" pitchFamily="34" charset="-122"/>
+                <a:cs typeface="Consolas" pitchFamily="34" charset="-120"/>
+              </a:rPr>
               <a:t>    credential=AzureCliCredential(),</a:t>
             </a:r>
             <a:endParaRPr lang="en-US" sz="1200" dirty="0"/>
@@ -10903,7 +11229,7 @@
             <a:r>
               <a:rPr lang="en-US" sz="1200" dirty="0">
                 <a:solidFill>
-                  <a:srgbClr val="212121"/>
+                  <a:srgbClr val="FFFFFF"/>
                 </a:solidFill>
                 <a:latin typeface="Consolas" pitchFamily="34" charset="0"/>
                 <a:ea typeface="Consolas" pitchFamily="34" charset="-122"/>
@@ -12034,11 +12360,11 @@
             <a:avLst/>
           </a:prstGeom>
           <a:solidFill>
-            <a:srgbClr val="F3F4F6"/>
+            <a:srgbClr val="1D1E22"/>
           </a:solidFill>
-          <a:ln w="6350">
+          <a:ln w="9525">
             <a:solidFill>
-              <a:srgbClr val="D1D5DB"/>
+              <a:srgbClr val="2A2B2E"/>
             </a:solidFill>
             <a:prstDash val="solid"/>
           </a:ln>
@@ -12062,7 +12388,9 @@
           <a:ln/>
         </p:spPr>
         <p:txBody>
-          <a:bodyPr wrap="square" lIns="0" tIns="0" rIns="0" bIns="0" rtlCol="0" anchor="t"/>
+          <a:bodyPr wrap="square" lIns="0" tIns="0" rIns="0" bIns="0" rtlCol="0" anchor="t">
+            <a:normAutofit/>
+          </a:bodyPr>
           <a:lstStyle/>
           <a:p>
             <a:pPr indent="0" marL="0">
@@ -12071,70 +12399,55 @@
             <a:r>
               <a:rPr lang="en-US" sz="1300" dirty="0">
                 <a:solidFill>
-                  <a:srgbClr val="212121"/>
+                  <a:srgbClr val="A996B6"/>
                 </a:solidFill>
                 <a:latin typeface="Consolas" pitchFamily="34" charset="0"/>
                 <a:ea typeface="Consolas" pitchFamily="34" charset="-122"/>
                 <a:cs typeface="Consolas" pitchFamily="34" charset="-120"/>
               </a:rPr>
-              <a:t>from agent_framework import Agent</a:t>
-            </a:r>
-            <a:endParaRPr lang="en-US" sz="1300" dirty="0"/>
-          </a:p>
-          <a:p>
+              <a:t>from</a:t>
+            </a:r>
             <a:pPr indent="0" marL="0">
               <a:buNone/>
             </a:pPr>
             <a:r>
               <a:rPr lang="en-US" sz="1300" dirty="0">
                 <a:solidFill>
-                  <a:srgbClr val="212121"/>
+                  <a:srgbClr val="FFFFFF"/>
                 </a:solidFill>
                 <a:latin typeface="Consolas" pitchFamily="34" charset="0"/>
                 <a:ea typeface="Consolas" pitchFamily="34" charset="-122"/>
                 <a:cs typeface="Consolas" pitchFamily="34" charset="-120"/>
               </a:rPr>
-              <a:t>from agent_framework.foundry import FoundryChatClient</a:t>
-            </a:r>
-            <a:endParaRPr lang="en-US" sz="1300" dirty="0"/>
-          </a:p>
-          <a:p>
+              <a:t> agent_framework </a:t>
+            </a:r>
             <a:pPr indent="0" marL="0">
               <a:buNone/>
             </a:pPr>
             <a:r>
               <a:rPr lang="en-US" sz="1300" dirty="0">
                 <a:solidFill>
-                  <a:srgbClr val="212121"/>
+                  <a:srgbClr val="A996B6"/>
                 </a:solidFill>
                 <a:latin typeface="Consolas" pitchFamily="34" charset="0"/>
                 <a:ea typeface="Consolas" pitchFamily="34" charset="-122"/>
                 <a:cs typeface="Consolas" pitchFamily="34" charset="-120"/>
               </a:rPr>
-              <a:t>from azure.identity import AzureCliCredential</a:t>
-            </a:r>
-            <a:endParaRPr lang="en-US" sz="1300" dirty="0"/>
-          </a:p>
-          <a:p>
+              <a:t>import</a:t>
+            </a:r>
             <a:pPr indent="0" marL="0">
               <a:buNone/>
             </a:pPr>
-            <a:endParaRPr lang="en-US" sz="1300" dirty="0"/>
-          </a:p>
-          <a:p>
-            <a:pPr indent="0" marL="0">
-              <a:buNone/>
-            </a:pPr>
             <a:r>
               <a:rPr lang="en-US" sz="1300" dirty="0">
                 <a:solidFill>
-                  <a:srgbClr val="212121"/>
+                  <a:srgbClr val="FFFFFF"/>
                 </a:solidFill>
                 <a:latin typeface="Consolas" pitchFamily="34" charset="0"/>
                 <a:ea typeface="Consolas" pitchFamily="34" charset="-122"/>
                 <a:cs typeface="Consolas" pitchFamily="34" charset="-120"/>
               </a:rPr>
-              <a:t>agent = Agent(</a:t>
+              <a:t> Agent</a:t>
             </a:r>
             <a:endParaRPr lang="en-US" sz="1300" dirty="0"/>
           </a:p>
@@ -12145,64 +12458,55 @@
             <a:r>
               <a:rPr lang="en-US" sz="1300" dirty="0">
                 <a:solidFill>
-                  <a:srgbClr val="212121"/>
+                  <a:srgbClr val="A996B6"/>
                 </a:solidFill>
                 <a:latin typeface="Consolas" pitchFamily="34" charset="0"/>
                 <a:ea typeface="Consolas" pitchFamily="34" charset="-122"/>
                 <a:cs typeface="Consolas" pitchFamily="34" charset="-120"/>
               </a:rPr>
-              <a:t>    client=FoundryChatClient(credential=AzureCliCredential()),</a:t>
-            </a:r>
-            <a:endParaRPr lang="en-US" sz="1300" dirty="0"/>
-          </a:p>
-          <a:p>
+              <a:t>from</a:t>
+            </a:r>
             <a:pPr indent="0" marL="0">
               <a:buNone/>
             </a:pPr>
             <a:r>
               <a:rPr lang="en-US" sz="1300" dirty="0">
                 <a:solidFill>
-                  <a:srgbClr val="212121"/>
+                  <a:srgbClr val="FFFFFF"/>
                 </a:solidFill>
                 <a:latin typeface="Consolas" pitchFamily="34" charset="0"/>
                 <a:ea typeface="Consolas" pitchFamily="34" charset="-122"/>
                 <a:cs typeface="Consolas" pitchFamily="34" charset="-120"/>
               </a:rPr>
-              <a:t>    name="DocsAssistant",</a:t>
-            </a:r>
-            <a:endParaRPr lang="en-US" sz="1300" dirty="0"/>
-          </a:p>
-          <a:p>
+              <a:t> agent_framework.foundry </a:t>
+            </a:r>
             <a:pPr indent="0" marL="0">
               <a:buNone/>
             </a:pPr>
             <a:r>
               <a:rPr lang="en-US" sz="1300" dirty="0">
                 <a:solidFill>
-                  <a:srgbClr val="212121"/>
+                  <a:srgbClr val="A996B6"/>
                 </a:solidFill>
                 <a:latin typeface="Consolas" pitchFamily="34" charset="0"/>
                 <a:ea typeface="Consolas" pitchFamily="34" charset="-122"/>
                 <a:cs typeface="Consolas" pitchFamily="34" charset="-120"/>
               </a:rPr>
-              <a:t>    instructions="You are a helpful docs assistant. Cite sources.",</a:t>
-            </a:r>
-            <a:endParaRPr lang="en-US" sz="1300" dirty="0"/>
-          </a:p>
-          <a:p>
+              <a:t>import</a:t>
+            </a:r>
             <a:pPr indent="0" marL="0">
               <a:buNone/>
             </a:pPr>
             <a:r>
               <a:rPr lang="en-US" sz="1300" dirty="0">
                 <a:solidFill>
-                  <a:srgbClr val="212121"/>
+                  <a:srgbClr val="FFFFFF"/>
                 </a:solidFill>
                 <a:latin typeface="Consolas" pitchFamily="34" charset="0"/>
                 <a:ea typeface="Consolas" pitchFamily="34" charset="-122"/>
                 <a:cs typeface="Consolas" pitchFamily="34" charset="-120"/>
               </a:rPr>
-              <a:t>)</a:t>
+              <a:t> FoundryChatClient</a:t>
             </a:r>
             <a:endParaRPr lang="en-US" sz="1300" dirty="0"/>
           </a:p>
@@ -12213,13 +12517,275 @@
             <a:r>
               <a:rPr lang="en-US" sz="1300" dirty="0">
                 <a:solidFill>
-                  <a:srgbClr val="212121"/>
+                  <a:srgbClr val="A996B6"/>
                 </a:solidFill>
                 <a:latin typeface="Consolas" pitchFamily="34" charset="0"/>
                 <a:ea typeface="Consolas" pitchFamily="34" charset="-122"/>
                 <a:cs typeface="Consolas" pitchFamily="34" charset="-120"/>
               </a:rPr>
-              <a:t>result = await agent.run("What is Foundry IQ?")</a:t>
+              <a:t>from</a:t>
+            </a:r>
+            <a:pPr indent="0" marL="0">
+              <a:buNone/>
+            </a:pPr>
+            <a:r>
+              <a:rPr lang="en-US" sz="1300" dirty="0">
+                <a:solidFill>
+                  <a:srgbClr val="FFFFFF"/>
+                </a:solidFill>
+                <a:latin typeface="Consolas" pitchFamily="34" charset="0"/>
+                <a:ea typeface="Consolas" pitchFamily="34" charset="-122"/>
+                <a:cs typeface="Consolas" pitchFamily="34" charset="-120"/>
+              </a:rPr>
+              <a:t> azure.identity </a:t>
+            </a:r>
+            <a:pPr indent="0" marL="0">
+              <a:buNone/>
+            </a:pPr>
+            <a:r>
+              <a:rPr lang="en-US" sz="1300" dirty="0">
+                <a:solidFill>
+                  <a:srgbClr val="A996B6"/>
+                </a:solidFill>
+                <a:latin typeface="Consolas" pitchFamily="34" charset="0"/>
+                <a:ea typeface="Consolas" pitchFamily="34" charset="-122"/>
+                <a:cs typeface="Consolas" pitchFamily="34" charset="-120"/>
+              </a:rPr>
+              <a:t>import</a:t>
+            </a:r>
+            <a:pPr indent="0" marL="0">
+              <a:buNone/>
+            </a:pPr>
+            <a:r>
+              <a:rPr lang="en-US" sz="1300" dirty="0">
+                <a:solidFill>
+                  <a:srgbClr val="FFFFFF"/>
+                </a:solidFill>
+                <a:latin typeface="Consolas" pitchFamily="34" charset="0"/>
+                <a:ea typeface="Consolas" pitchFamily="34" charset="-122"/>
+                <a:cs typeface="Consolas" pitchFamily="34" charset="-120"/>
+              </a:rPr>
+              <a:t> AzureCliCredential</a:t>
+            </a:r>
+            <a:endParaRPr lang="en-US" sz="1300" dirty="0"/>
+          </a:p>
+          <a:p>
+            <a:pPr indent="0" marL="0">
+              <a:buNone/>
+            </a:pPr>
+            <a:endParaRPr lang="en-US" sz="1300" dirty="0"/>
+          </a:p>
+          <a:p>
+            <a:pPr indent="0" marL="0">
+              <a:buNone/>
+            </a:pPr>
+            <a:r>
+              <a:rPr lang="en-US" sz="1300" dirty="0">
+                <a:solidFill>
+                  <a:srgbClr val="FFFFFF"/>
+                </a:solidFill>
+                <a:latin typeface="Consolas" pitchFamily="34" charset="0"/>
+                <a:ea typeface="Consolas" pitchFamily="34" charset="-122"/>
+                <a:cs typeface="Consolas" pitchFamily="34" charset="-120"/>
+              </a:rPr>
+              <a:t>agent = Agent(</a:t>
+            </a:r>
+            <a:endParaRPr lang="en-US" sz="1300" dirty="0"/>
+          </a:p>
+          <a:p>
+            <a:pPr indent="0" marL="0">
+              <a:buNone/>
+            </a:pPr>
+            <a:r>
+              <a:rPr lang="en-US" sz="1300" dirty="0">
+                <a:solidFill>
+                  <a:srgbClr val="FFFFFF"/>
+                </a:solidFill>
+                <a:latin typeface="Consolas" pitchFamily="34" charset="0"/>
+                <a:ea typeface="Consolas" pitchFamily="34" charset="-122"/>
+                <a:cs typeface="Consolas" pitchFamily="34" charset="-120"/>
+              </a:rPr>
+              <a:t>    client=FoundryChatClient(credential=AzureCliCredential()),</a:t>
+            </a:r>
+            <a:endParaRPr lang="en-US" sz="1300" dirty="0"/>
+          </a:p>
+          <a:p>
+            <a:pPr indent="0" marL="0">
+              <a:buNone/>
+            </a:pPr>
+            <a:r>
+              <a:rPr lang="en-US" sz="1300" dirty="0">
+                <a:solidFill>
+                  <a:srgbClr val="FFFFFF"/>
+                </a:solidFill>
+                <a:latin typeface="Consolas" pitchFamily="34" charset="0"/>
+                <a:ea typeface="Consolas" pitchFamily="34" charset="-122"/>
+                <a:cs typeface="Consolas" pitchFamily="34" charset="-120"/>
+              </a:rPr>
+              <a:t>    name=</a:t>
+            </a:r>
+            <a:pPr indent="0" marL="0">
+              <a:buNone/>
+            </a:pPr>
+            <a:r>
+              <a:rPr lang="en-US" sz="1300" dirty="0">
+                <a:solidFill>
+                  <a:srgbClr val="E4C98A"/>
+                </a:solidFill>
+                <a:latin typeface="Consolas" pitchFamily="34" charset="0"/>
+                <a:ea typeface="Consolas" pitchFamily="34" charset="-122"/>
+                <a:cs typeface="Consolas" pitchFamily="34" charset="-120"/>
+              </a:rPr>
+              <a:t>"DocsAssistant"</a:t>
+            </a:r>
+            <a:pPr indent="0" marL="0">
+              <a:buNone/>
+            </a:pPr>
+            <a:r>
+              <a:rPr lang="en-US" sz="1300" dirty="0">
+                <a:solidFill>
+                  <a:srgbClr val="FFFFFF"/>
+                </a:solidFill>
+                <a:latin typeface="Consolas" pitchFamily="34" charset="0"/>
+                <a:ea typeface="Consolas" pitchFamily="34" charset="-122"/>
+                <a:cs typeface="Consolas" pitchFamily="34" charset="-120"/>
+              </a:rPr>
+              <a:t>,</a:t>
+            </a:r>
+            <a:endParaRPr lang="en-US" sz="1300" dirty="0"/>
+          </a:p>
+          <a:p>
+            <a:pPr indent="0" marL="0">
+              <a:buNone/>
+            </a:pPr>
+            <a:r>
+              <a:rPr lang="en-US" sz="1300" dirty="0">
+                <a:solidFill>
+                  <a:srgbClr val="FFFFFF"/>
+                </a:solidFill>
+                <a:latin typeface="Consolas" pitchFamily="34" charset="0"/>
+                <a:ea typeface="Consolas" pitchFamily="34" charset="-122"/>
+                <a:cs typeface="Consolas" pitchFamily="34" charset="-120"/>
+              </a:rPr>
+              <a:t>    instructions=</a:t>
+            </a:r>
+            <a:pPr indent="0" marL="0">
+              <a:buNone/>
+            </a:pPr>
+            <a:r>
+              <a:rPr lang="en-US" sz="1300" dirty="0">
+                <a:solidFill>
+                  <a:srgbClr val="E4C98A"/>
+                </a:solidFill>
+                <a:latin typeface="Consolas" pitchFamily="34" charset="0"/>
+                <a:ea typeface="Consolas" pitchFamily="34" charset="-122"/>
+                <a:cs typeface="Consolas" pitchFamily="34" charset="-120"/>
+              </a:rPr>
+              <a:t>"You are a helpful docs assistant. Cite sources."</a:t>
+            </a:r>
+            <a:pPr indent="0" marL="0">
+              <a:buNone/>
+            </a:pPr>
+            <a:r>
+              <a:rPr lang="en-US" sz="1300" dirty="0">
+                <a:solidFill>
+                  <a:srgbClr val="FFFFFF"/>
+                </a:solidFill>
+                <a:latin typeface="Consolas" pitchFamily="34" charset="0"/>
+                <a:ea typeface="Consolas" pitchFamily="34" charset="-122"/>
+                <a:cs typeface="Consolas" pitchFamily="34" charset="-120"/>
+              </a:rPr>
+              <a:t>,</a:t>
+            </a:r>
+            <a:endParaRPr lang="en-US" sz="1300" dirty="0"/>
+          </a:p>
+          <a:p>
+            <a:pPr indent="0" marL="0">
+              <a:buNone/>
+            </a:pPr>
+            <a:r>
+              <a:rPr lang="en-US" sz="1300" dirty="0">
+                <a:solidFill>
+                  <a:srgbClr val="FFFFFF"/>
+                </a:solidFill>
+                <a:latin typeface="Consolas" pitchFamily="34" charset="0"/>
+                <a:ea typeface="Consolas" pitchFamily="34" charset="-122"/>
+                <a:cs typeface="Consolas" pitchFamily="34" charset="-120"/>
+              </a:rPr>
+              <a:t>)</a:t>
+            </a:r>
+            <a:endParaRPr lang="en-US" sz="1300" dirty="0"/>
+          </a:p>
+          <a:p>
+            <a:pPr indent="0" marL="0">
+              <a:buNone/>
+            </a:pPr>
+            <a:r>
+              <a:rPr lang="en-US" sz="1300" dirty="0">
+                <a:solidFill>
+                  <a:srgbClr val="FFFFFF"/>
+                </a:solidFill>
+                <a:latin typeface="Consolas" pitchFamily="34" charset="0"/>
+                <a:ea typeface="Consolas" pitchFamily="34" charset="-122"/>
+                <a:cs typeface="Consolas" pitchFamily="34" charset="-120"/>
+              </a:rPr>
+              <a:t>result = </a:t>
+            </a:r>
+            <a:pPr indent="0" marL="0">
+              <a:buNone/>
+            </a:pPr>
+            <a:r>
+              <a:rPr lang="en-US" sz="1300" dirty="0">
+                <a:solidFill>
+                  <a:srgbClr val="A996B6"/>
+                </a:solidFill>
+                <a:latin typeface="Consolas" pitchFamily="34" charset="0"/>
+                <a:ea typeface="Consolas" pitchFamily="34" charset="-122"/>
+                <a:cs typeface="Consolas" pitchFamily="34" charset="-120"/>
+              </a:rPr>
+              <a:t>await</a:t>
+            </a:r>
+            <a:pPr indent="0" marL="0">
+              <a:buNone/>
+            </a:pPr>
+            <a:r>
+              <a:rPr lang="en-US" sz="1300" dirty="0">
+                <a:solidFill>
+                  <a:srgbClr val="FFFFFF"/>
+                </a:solidFill>
+                <a:latin typeface="Consolas" pitchFamily="34" charset="0"/>
+                <a:ea typeface="Consolas" pitchFamily="34" charset="-122"/>
+                <a:cs typeface="Consolas" pitchFamily="34" charset="-120"/>
+              </a:rPr>
+              <a:t> agent.run(</a:t>
+            </a:r>
+            <a:pPr indent="0" marL="0">
+              <a:buNone/>
+            </a:pPr>
+            <a:r>
+              <a:rPr lang="en-US" sz="1300" dirty="0">
+                <a:solidFill>
+                  <a:srgbClr val="E4C98A"/>
+                </a:solidFill>
+                <a:latin typeface="Consolas" pitchFamily="34" charset="0"/>
+                <a:ea typeface="Consolas" pitchFamily="34" charset="-122"/>
+                <a:cs typeface="Consolas" pitchFamily="34" charset="-120"/>
+              </a:rPr>
+              <a:t>"What is Foundry IQ?"</a:t>
+            </a:r>
+            <a:pPr indent="0" marL="0">
+              <a:buNone/>
+            </a:pPr>
+            <a:r>
+              <a:rPr lang="en-US" sz="1300" dirty="0">
+                <a:solidFill>
+                  <a:srgbClr val="FFFFFF"/>
+                </a:solidFill>
+                <a:latin typeface="Consolas" pitchFamily="34" charset="0"/>
+                <a:ea typeface="Consolas" pitchFamily="34" charset="-122"/>
+                <a:cs typeface="Consolas" pitchFamily="34" charset="-120"/>
+              </a:rPr>
+              <a:t>)</a:t>
             </a:r>
             <a:endParaRPr lang="en-US" sz="1300" dirty="0"/>
           </a:p>
@@ -12409,11 +12975,11 @@
             <a:avLst/>
           </a:prstGeom>
           <a:solidFill>
-            <a:srgbClr val="F3F4F6"/>
+            <a:srgbClr val="1D1E22"/>
           </a:solidFill>
-          <a:ln w="6350">
+          <a:ln w="9525">
             <a:solidFill>
-              <a:srgbClr val="D1D5DB"/>
+              <a:srgbClr val="2A2B2E"/>
             </a:solidFill>
             <a:prstDash val="solid"/>
           </a:ln>
@@ -12437,7 +13003,9 @@
           <a:ln/>
         </p:spPr>
         <p:txBody>
-          <a:bodyPr wrap="square" lIns="0" tIns="0" rIns="0" bIns="0" rtlCol="0" anchor="t"/>
+          <a:bodyPr wrap="square" lIns="0" tIns="0" rIns="0" bIns="0" rtlCol="0" anchor="t">
+            <a:normAutofit/>
+          </a:bodyPr>
           <a:lstStyle/>
           <a:p>
             <a:pPr indent="0" marL="0">
@@ -12446,7 +13014,7 @@
             <a:r>
               <a:rPr lang="en-US" sz="1300" dirty="0">
                 <a:solidFill>
-                  <a:srgbClr val="212121"/>
+                  <a:srgbClr val="FFFFFF"/>
                 </a:solidFill>
                 <a:latin typeface="Consolas" pitchFamily="34" charset="0"/>
                 <a:ea typeface="Consolas" pitchFamily="34" charset="-122"/>
@@ -12463,7 +13031,7 @@
             <a:r>
               <a:rPr lang="en-US" sz="1300" dirty="0">
                 <a:solidFill>
-                  <a:srgbClr val="212121"/>
+                  <a:srgbClr val="FFFFFF"/>
                 </a:solidFill>
                 <a:latin typeface="Consolas" pitchFamily="34" charset="0"/>
                 <a:ea typeface="Consolas" pitchFamily="34" charset="-122"/>
@@ -12480,7 +13048,7 @@
             <a:r>
               <a:rPr lang="en-US" sz="1300" dirty="0">
                 <a:solidFill>
-                  <a:srgbClr val="212121"/>
+                  <a:srgbClr val="FFFFFF"/>
                 </a:solidFill>
                 <a:latin typeface="Consolas" pitchFamily="34" charset="0"/>
                 <a:ea typeface="Consolas" pitchFamily="34" charset="-122"/>
@@ -12503,7 +13071,7 @@
             <a:r>
               <a:rPr lang="en-US" sz="1300" dirty="0">
                 <a:solidFill>
-                  <a:srgbClr val="212121"/>
+                  <a:srgbClr val="FFFFFF"/>
                 </a:solidFill>
                 <a:latin typeface="Consolas" pitchFamily="34" charset="0"/>
                 <a:ea typeface="Consolas" pitchFamily="34" charset="-122"/>
@@ -12520,7 +13088,7 @@
             <a:r>
               <a:rPr lang="en-US" sz="1300" dirty="0">
                 <a:solidFill>
-                  <a:srgbClr val="212121"/>
+                  <a:srgbClr val="FFFFFF"/>
                 </a:solidFill>
                 <a:latin typeface="Consolas" pitchFamily="34" charset="0"/>
                 <a:ea typeface="Consolas" pitchFamily="34" charset="-122"/>
@@ -12537,7 +13105,7 @@
             <a:r>
               <a:rPr lang="en-US" sz="1300" dirty="0">
                 <a:solidFill>
-                  <a:srgbClr val="212121"/>
+                  <a:srgbClr val="FFFFFF"/>
                 </a:solidFill>
                 <a:latin typeface="Consolas" pitchFamily="34" charset="0"/>
                 <a:ea typeface="Consolas" pitchFamily="34" charset="-122"/>
@@ -12554,7 +13122,7 @@
             <a:r>
               <a:rPr lang="en-US" sz="1300" dirty="0">
                 <a:solidFill>
-                  <a:srgbClr val="212121"/>
+                  <a:srgbClr val="FFFFFF"/>
                 </a:solidFill>
                 <a:latin typeface="Consolas" pitchFamily="34" charset="0"/>
                 <a:ea typeface="Consolas" pitchFamily="34" charset="-122"/>
@@ -12571,53 +13139,165 @@
             <a:r>
               <a:rPr lang="en-US" sz="1300" dirty="0">
                 <a:solidFill>
-                  <a:srgbClr val="212121"/>
+                  <a:srgbClr val="FFFFFF"/>
                 </a:solidFill>
                 <a:latin typeface="Consolas" pitchFamily="34" charset="0"/>
                 <a:ea typeface="Consolas" pitchFamily="34" charset="-122"/>
                 <a:cs typeface="Consolas" pitchFamily="34" charset="-120"/>
               </a:rPr>
-              <a:t>        name: "DocsAssistant",</a:t>
-            </a:r>
-            <a:endParaRPr lang="en-US" sz="1300" dirty="0"/>
-          </a:p>
-          <a:p>
+              <a:t>        name: </a:t>
+            </a:r>
             <a:pPr indent="0" marL="0">
               <a:buNone/>
             </a:pPr>
             <a:r>
               <a:rPr lang="en-US" sz="1300" dirty="0">
                 <a:solidFill>
-                  <a:srgbClr val="212121"/>
+                  <a:srgbClr val="E4C98A"/>
                 </a:solidFill>
                 <a:latin typeface="Consolas" pitchFamily="34" charset="0"/>
                 <a:ea typeface="Consolas" pitchFamily="34" charset="-122"/>
                 <a:cs typeface="Consolas" pitchFamily="34" charset="-120"/>
               </a:rPr>
-              <a:t>        instructions: "You are a helpful docs assistant. Cite sources.");</a:t>
-            </a:r>
-            <a:endParaRPr lang="en-US" sz="1300" dirty="0"/>
-          </a:p>
-          <a:p>
+              <a:t>"DocsAssistant"</a:t>
+            </a:r>
             <a:pPr indent="0" marL="0">
               <a:buNone/>
             </a:pPr>
-            <a:endParaRPr lang="en-US" sz="1300" dirty="0"/>
-          </a:p>
-          <a:p>
-            <a:pPr indent="0" marL="0">
-              <a:buNone/>
-            </a:pPr>
             <a:r>
               <a:rPr lang="en-US" sz="1300" dirty="0">
                 <a:solidFill>
-                  <a:srgbClr val="212121"/>
+                  <a:srgbClr val="FFFFFF"/>
                 </a:solidFill>
                 <a:latin typeface="Consolas" pitchFamily="34" charset="0"/>
                 <a:ea typeface="Consolas" pitchFamily="34" charset="-122"/>
                 <a:cs typeface="Consolas" pitchFamily="34" charset="-120"/>
               </a:rPr>
-              <a:t>Console.WriteLine(await agent.RunAsync("What is Foundry IQ?"));</a:t>
+              <a:t>,</a:t>
+            </a:r>
+            <a:endParaRPr lang="en-US" sz="1300" dirty="0"/>
+          </a:p>
+          <a:p>
+            <a:pPr indent="0" marL="0">
+              <a:buNone/>
+            </a:pPr>
+            <a:r>
+              <a:rPr lang="en-US" sz="1300" dirty="0">
+                <a:solidFill>
+                  <a:srgbClr val="FFFFFF"/>
+                </a:solidFill>
+                <a:latin typeface="Consolas" pitchFamily="34" charset="0"/>
+                <a:ea typeface="Consolas" pitchFamily="34" charset="-122"/>
+                <a:cs typeface="Consolas" pitchFamily="34" charset="-120"/>
+              </a:rPr>
+              <a:t>        instructions: </a:t>
+            </a:r>
+            <a:pPr indent="0" marL="0">
+              <a:buNone/>
+            </a:pPr>
+            <a:r>
+              <a:rPr lang="en-US" sz="1300" dirty="0">
+                <a:solidFill>
+                  <a:srgbClr val="E4C98A"/>
+                </a:solidFill>
+                <a:latin typeface="Consolas" pitchFamily="34" charset="0"/>
+                <a:ea typeface="Consolas" pitchFamily="34" charset="-122"/>
+                <a:cs typeface="Consolas" pitchFamily="34" charset="-120"/>
+              </a:rPr>
+              <a:t>"You are a helpful docs assistant. Cite sources."</a:t>
+            </a:r>
+            <a:pPr indent="0" marL="0">
+              <a:buNone/>
+            </a:pPr>
+            <a:r>
+              <a:rPr lang="en-US" sz="1300" dirty="0">
+                <a:solidFill>
+                  <a:srgbClr val="FFFFFF"/>
+                </a:solidFill>
+                <a:latin typeface="Consolas" pitchFamily="34" charset="0"/>
+                <a:ea typeface="Consolas" pitchFamily="34" charset="-122"/>
+                <a:cs typeface="Consolas" pitchFamily="34" charset="-120"/>
+              </a:rPr>
+              <a:t>);</a:t>
+            </a:r>
+            <a:endParaRPr lang="en-US" sz="1300" dirty="0"/>
+          </a:p>
+          <a:p>
+            <a:pPr indent="0" marL="0">
+              <a:buNone/>
+            </a:pPr>
+            <a:endParaRPr lang="en-US" sz="1300" dirty="0"/>
+          </a:p>
+          <a:p>
+            <a:pPr indent="0" marL="0">
+              <a:buNone/>
+            </a:pPr>
+            <a:r>
+              <a:rPr lang="en-US" sz="1300" dirty="0">
+                <a:solidFill>
+                  <a:srgbClr val="FFFFFF"/>
+                </a:solidFill>
+                <a:latin typeface="Consolas" pitchFamily="34" charset="0"/>
+                <a:ea typeface="Consolas" pitchFamily="34" charset="-122"/>
+                <a:cs typeface="Consolas" pitchFamily="34" charset="-120"/>
+              </a:rPr>
+              <a:t>Console.WriteLine(</a:t>
+            </a:r>
+            <a:pPr indent="0" marL="0">
+              <a:buNone/>
+            </a:pPr>
+            <a:r>
+              <a:rPr lang="en-US" sz="1300" dirty="0">
+                <a:solidFill>
+                  <a:srgbClr val="A996B6"/>
+                </a:solidFill>
+                <a:latin typeface="Consolas" pitchFamily="34" charset="0"/>
+                <a:ea typeface="Consolas" pitchFamily="34" charset="-122"/>
+                <a:cs typeface="Consolas" pitchFamily="34" charset="-120"/>
+              </a:rPr>
+              <a:t>await</a:t>
+            </a:r>
+            <a:pPr indent="0" marL="0">
+              <a:buNone/>
+            </a:pPr>
+            <a:r>
+              <a:rPr lang="en-US" sz="1300" dirty="0">
+                <a:solidFill>
+                  <a:srgbClr val="FFFFFF"/>
+                </a:solidFill>
+                <a:latin typeface="Consolas" pitchFamily="34" charset="0"/>
+                <a:ea typeface="Consolas" pitchFamily="34" charset="-122"/>
+                <a:cs typeface="Consolas" pitchFamily="34" charset="-120"/>
+              </a:rPr>
+              <a:t> agent.RunAsync(</a:t>
+            </a:r>
+            <a:pPr indent="0" marL="0">
+              <a:buNone/>
+            </a:pPr>
+            <a:r>
+              <a:rPr lang="en-US" sz="1300" dirty="0">
+                <a:solidFill>
+                  <a:srgbClr val="E4C98A"/>
+                </a:solidFill>
+                <a:latin typeface="Consolas" pitchFamily="34" charset="0"/>
+                <a:ea typeface="Consolas" pitchFamily="34" charset="-122"/>
+                <a:cs typeface="Consolas" pitchFamily="34" charset="-120"/>
+              </a:rPr>
+              <a:t>"What is Foundry IQ?"</a:t>
+            </a:r>
+            <a:pPr indent="0" marL="0">
+              <a:buNone/>
+            </a:pPr>
+            <a:r>
+              <a:rPr lang="en-US" sz="1300" dirty="0">
+                <a:solidFill>
+                  <a:srgbClr val="FFFFFF"/>
+                </a:solidFill>
+                <a:latin typeface="Consolas" pitchFamily="34" charset="0"/>
+                <a:ea typeface="Consolas" pitchFamily="34" charset="-122"/>
+                <a:cs typeface="Consolas" pitchFamily="34" charset="-120"/>
+              </a:rPr>
+              <a:t>));</a:t>
             </a:r>
             <a:endParaRPr lang="en-US" sz="1300" dirty="0"/>
           </a:p>
